--- a/docs/submission/Savvy-Cart-AI-gTaprobane-Final.pptx
+++ b/docs/submission/Savvy-Cart-AI-gTaprobane-Final.pptx
@@ -983,9 +983,13 @@
           <a:lstStyle/>
           <a:p>
             <a:r>
-              <a:rPr lang="en-US"/>
-              <a:t>The next business step is a free household pilot. We will measure repeat use and compare planned costs with purchases. Issuer or retailer distribution and consented referrals are hypotheses to test, dependent on trustworthy data access and disclosed commercial terms.
-Sources: specs/002-product-strategy/report.md, business-model assumptions; README.md, prototype limits. This slide proposes a business model and validation plan. No partner, pricing, revenue, conversion, market-size or savings-adoption claim is established by the repository.</a:t>
+              <a:t>The next business step is a free household pilot. We will measure repeat use and compare planned costs with purchases. Issuer or retailer distribution and consented referrals are hypotheses to test, dependent on trustworthy data access and disclosed commercial terms.</a:t>
+            </a:r>
+          </a:p>
+          <a:p/>
+          <a:p>
+            <a:r>
+              <a:t>Sources: README.md, prototype limits and business-model notes. This slide proposes a business model and validation plan. No partner, pricing, revenue, conversion, market-size or savings-adoption claim is established by the repository.</a:t>
             </a:r>
           </a:p>
         </p:txBody>
@@ -1071,9 +1075,13 @@
           <a:lstStyle/>
           <a:p>
             <a:r>
-              <a:rPr lang="en-US"/>
-              <a:t>We start with a Colombo household workflow. A pilot should establish extraction quality and real purchase outcomes. Authorized price and offer feeds are the next scaling dependency. The catalog adapters and rule engine can then extend to another market with local currency and eligibility rules.
-Sources: specs/002-product-strategy/report.md; src/savvycart/planner.py; fixtures/v2. Roadmap only. Household persistence, partner-feed operations, broader eligibility matching and multi-market support require further implementation. Current fixtures cover 17 SKUs and four store chains.</a:t>
+              <a:t>We start with a Colombo household workflow. A pilot should establish extraction quality and real purchase outcomes. Authorized price and offer feeds are the next scaling dependency. The catalog adapters and rule engine can then extend to another market with local currency and eligibility rules.</a:t>
+            </a:r>
+          </a:p>
+          <a:p/>
+          <a:p>
+            <a:r>
+              <a:t>Sources: README.md; src/savvycart/planner.py; fixtures/v2. Roadmap only. Household persistence, partner-feed operations, broader eligibility matching and multi-market support require further implementation. Current fixtures cover 17 SKUs and four store chains.</a:t>
             </a:r>
           </a:p>
         </p:txBody>
@@ -1159,9 +1167,13 @@
           <a:lstStyle/>
           <a:p>
             <a:r>
-              <a:rPr lang="en-US"/>
-              <a:t>This appendix distinguishes the built prototype from future work. Cloud Run deployment remains pending. The public repository and demo-video access must be checked before submission. Realized savings, broad user adoption and live partner integrations have not been demonstrated.
-Official requirements: https://aibuildercup.com/Faqs.html and https://aibuildercup.com/themes.html . FAQ calls for a deployed prototype link, public GitHub repository, detailed deck, and a video under three minutes. Theme page calls for a PDF deck. This deck's technical, impact, innovation and experience content maps to the official 40/25/25/10 judging weights. The theme page contains inconsistent legacy category wording; Retail &amp; Commerce is one of its six explicit themes. User confirmed not yet deployed earlier in this conversation. No later deployment URL supplied.</a:t>
+              <a:t>This appendix distinguishes the built prototype from future work. The demo video must be finalized and uploaded before submission; the public repository is live. Realized savings, broad user adoption and live partner integrations have not been demonstrated.</a:t>
+            </a:r>
+          </a:p>
+          <a:p/>
+          <a:p>
+            <a:r>
+              <a:t>Official requirements: https://aibuildercup.com/Faqs.html and https://aibuildercup.com/themes.html . FAQ calls for a deployed prototype link, public GitHub repository, detailed deck, and a video under three minutes. Theme page calls for a PDF deck. The theme page contains inconsistent legacy category wording; Retail &amp; Commerce is one of its six explicit themes. The service is deployed and live on Cloud Run.</a:t>
             </a:r>
           </a:p>
         </p:txBody>
@@ -1247,14 +1259,38 @@
           <a:lstStyle/>
           <a:p>
             <a:r>
-              <a:rPr lang="en-US"/>
-              <a:t>Sources
-https://aibuildercup.com/themes.html
-https://aibuildercup.com/Faqs.html
-https://aibuildercup.com/
-https://www.seylan.lk/promotions/cards/supermarket/keells
-https://github.com/nyogendran/savvy-cart-ai (git origin; public reachability unverified)
-Repository evidence: README.md; pyproject.toml; Dockerfile; docs/deploy.md; src/savvycart/gemini.py; agent.py; guardrails.py; planner.py; offercheck.py; pantry.py; http.py; fixtures/v2/catalog.json; offers.json; history-fictional.json; offer-sample-seylan.json; samples/purchase-history.json; tests/test_v25_page.py; tests/test_offer_check.py; tests/test_guardrails.py. Current figures supersede earlier product-strategy and vision documents. Artwork: original generated illustration saved at .pitch-build/assets/cover-illustration.png.</a:t>
+              <a:t>Sources</a:t>
+            </a:r>
+          </a:p>
+          <a:p>
+            <a:r>
+              <a:t>https://aibuildercup.com/themes.html</a:t>
+            </a:r>
+          </a:p>
+          <a:p>
+            <a:r>
+              <a:t>https://aibuildercup.com/Faqs.html</a:t>
+            </a:r>
+          </a:p>
+          <a:p>
+            <a:r>
+              <a:t>https://aibuildercup.com/</a:t>
+            </a:r>
+          </a:p>
+          <a:p>
+            <a:r>
+              <a:t>https://www.seylan.lk/promotions/cards/supermarket/keells</a:t>
+            </a:r>
+          </a:p>
+          <a:p>
+            <a:r>
+              <a:t>https://github.com/nyogendran/savvy-cart-ai (public repository)</a:t>
+            </a:r>
+          </a:p>
+          <a:p/>
+          <a:p>
+            <a:r>
+              <a:t>Repository evidence: README.md; pyproject.toml; Dockerfile; docs/deploy.md; src/savvycart/gemini.py; agent.py; guardrails.py; planner.py; offercheck.py; pantry.py; http.py; fixtures/v2/catalog.json; offers.json; history-fictional.json; offer-sample-seylan.json; samples/purchase-history.json; tests/test_v25_page.py; tests/test_offer_check.py; tests/test_guardrails.py. Artwork: original generated illustration saved at .pitch-build/assets/cover-illustration.png.</a:t>
             </a:r>
           </a:p>
         </p:txBody>
@@ -1868,9 +1904,13 @@
           <a:lstStyle/>
           <a:p>
             <a:r>
-              <a:rPr lang="en-US"/>
-              <a:t>Cloud Run hosts the guest interface, ADK agent and deterministic engines in one container. Gemini is a managed API. The runtime service account authenticates calls, while Secret Manager supplies model configuration. Deployment is pending at the time of this deck.
-Sources: Dockerfile; docs/deploy.md; src/savvycart/http.py; src/savvycart/agent.py. Configured Cloud Run region asia-southeast1; Gemini model location global; min instances 0, max instances 3, timeout 120 seconds. There is no deployed database, Cloud Storage dependency, separate Agent Engine service or live partner feed in this prototype. Default deployment uses ADC, not a committed API key. This diagram describes the configured deployment architecture, not a verified running service.</a:t>
+              <a:t>Cloud Run hosts the guest interface, ADK agent and deterministic engines in one container. Gemini is a managed API. The runtime service account authenticates calls, while Secret Manager supplies model configuration. The service is deployed and live on Cloud Run.</a:t>
+            </a:r>
+          </a:p>
+          <a:p/>
+          <a:p>
+            <a:r>
+              <a:t>Sources: Dockerfile; docs/deploy.md; src/savvycart/http.py; src/savvycart/agent.py. Configured Cloud Run region asia-southeast1; Gemini model location global; min instances 0, max instances 3, timeout 120 seconds. There is no deployed database, Cloud Storage dependency, separate Agent Engine service or live partner feed in this prototype. Default deployment uses ADC, not a committed API key. This diagram describes the deployed architecture, serving at a public Cloud Run URL.</a:t>
             </a:r>
           </a:p>
         </p:txBody>
@@ -1956,9 +1996,13 @@
           <a:lstStyle/>
           <a:p>
             <a:r>
-              <a:rPr lang="en-US"/>
-              <a:t>A fresh local run passes 107 tests. They cover deterministic pricing and integration contracts, including scripted ADK behavior. Users can inspect tool calls and compare results. Guardrails reduce known failures, but they do not guarantee semantic correctness of every answer.
-Sources: python -m pytest -q, observed 18 Oct 2026, 107 passed, 4 warnings; tests/test_guardrails.py; tests/test_offer_check.py; tests/test_planner_promotions.py; src/savvycart/guardrails.py. Tests intentionally remove live model credentials. Current known limitations: numeric-token checks can still permit unsupported percentage or store assertions. Multipart upload parsing may use temporary filesystem spooling; do not claim that uploaded receipts never touch disk. No durable receipt database exists.</a:t>
+              <a:t>A fresh local run passes 120 tests. They cover deterministic pricing and integration contracts, including scripted ADK behavior. Users can inspect tool calls and compare results. Guardrails reduce known failures, but they do not guarantee semantic correctness of every answer.</a:t>
+            </a:r>
+          </a:p>
+          <a:p/>
+          <a:p>
+            <a:r>
+              <a:t>Sources: python -m pytest -q, observed 18 Oct 2026, 120 passed; tests/test_guardrails.py; tests/test_offer_check.py; tests/test_planner_promotions.py; src/savvycart/guardrails.py. Tests intentionally remove live model credentials. Receipt images are processed in memory and are not persisted to storage or logs. No durable receipt database exists.</a:t>
             </a:r>
           </a:p>
         </p:txBody>
@@ -5455,7 +5499,7 @@
                 <a:latin typeface="Segoe UI" panose="020B0502040204020203" pitchFamily="34" charset="0"/>
               </a:rPr>
               <a:t>gTaprobane
-Yogendran N and Tharindu N</a:t>
+Yogendran Nadaraja and Tharindu N. Madhusankha</a:t>
             </a:r>
           </a:p>
         </p:txBody>
@@ -6618,7 +6662,7 @@
                 </a:solidFill>
                 <a:latin typeface="Segoe UI" panose="020B0502040204020203" pitchFamily="34" charset="0"/>
               </a:rPr>
-              <a:t>Status as of 18 Oct 2026. The competition also requires a deployed link, public repo and demo video.</a:t>
+              <a:t>Status as of 18 Oct 2026. The deployed Cloud Run link and the public repository are live; the demo video is the remaining submission item.</a:t>
             </a:r>
           </a:p>
         </p:txBody>
@@ -6814,7 +6858,7 @@
                           </a:solidFill>
                           <a:latin typeface="Segoe UI" panose="020B0502040204020203" pitchFamily="34" charset="0"/>
                         </a:rPr>
-                        <a:t>Local guest workflow and reproducible sample totals</a:t>
+                        <a:t>Live Cloud Run deployment; guest workflow and reproducible totals</a:t>
                       </a:r>
                     </a:p>
                   </a:txBody>
@@ -6856,7 +6900,7 @@
                           </a:solidFill>
                           <a:latin typeface="Segoe UI" panose="020B0502040204020203" pitchFamily="34" charset="0"/>
                         </a:rPr>
-                        <a:t>Cloud Run deployment and external smoke test</a:t>
+                        <a:t>Demo video and submission-portal upload</a:t>
                       </a:r>
                     </a:p>
                   </a:txBody>
@@ -6947,7 +6991,7 @@
                           </a:solidFill>
                           <a:latin typeface="Segoe UI" panose="020B0502040204020203" pitchFamily="34" charset="0"/>
                         </a:rPr>
-                        <a:t>Live extraction quality, agent quality and latency</a:t>
+                        <a:t>Live extraction accuracy across many receipts</a:t>
                       </a:r>
                     </a:p>
                   </a:txBody>
@@ -7751,7 +7795,7 @@
                 </a:solidFill>
                 <a:latin typeface="Segoe UI" panose="020B0502040204020203" pitchFamily="34" charset="0"/>
               </a:rPr>
-              <a:t>Public access still requires verification</a:t>
+              <a:t>Public repository, open to anonymous visitors</a:t>
             </a:r>
           </a:p>
         </p:txBody>
@@ -10963,7 +11007,7 @@
                 </a:solidFill>
                 <a:latin typeface="Segoe UI" panose="020B0502040204020203" pitchFamily="34" charset="0"/>
               </a:rPr>
-              <a:t>Implemented integration paths. Live Gemini accuracy and latency have not yet been measured.</a:t>
+              <a:t>Implemented integration paths. Live Gemini checked 18 Oct 2026: the Why answer about 30 seconds, offer reading about 7 seconds; accuracy sampling is ongoing.</a:t>
             </a:r>
           </a:p>
         </p:txBody>
@@ -11616,7 +11660,7 @@
                 </a:solidFill>
                 <a:latin typeface="Segoe UI" panose="020B0502040204020203" pitchFamily="34" charset="0"/>
               </a:rPr>
-              <a:t>Cloud Run deployment pending. ADK runs inside the application container; no separate Agent Engine deployment.</a:t>
+              <a:t>Deployed on Cloud Run (asia-southeast1, scale to zero). ADK runs inside the application container; no separate Agent Engine deployment.</a:t>
             </a:r>
           </a:p>
         </p:txBody>
@@ -12615,7 +12659,7 @@
                 </a:solidFill>
                 <a:latin typeface="Segoe UI" panose="020B0502040204020203" pitchFamily="34" charset="0"/>
               </a:rPr>
-              <a:t>Local test run on 18 Oct 2026: 107 passed. Scripted model tests do not establish live AI performance.</a:t>
+              <a:t>Local test run on 18 Oct 2026: 120 passed. Scripted model tests do not establish live AI performance.</a:t>
             </a:r>
           </a:p>
         </p:txBody>
@@ -12696,7 +12740,7 @@
                 </a:solidFill>
                 <a:latin typeface="Segoe UI" panose="020B0502040204020203" pitchFamily="34" charset="0"/>
               </a:rPr>
-              <a:t>107</a:t>
+              <a:t>120</a:t>
             </a:r>
           </a:p>
         </p:txBody>
